--- a/Docs/AR-Vision_成果発表_draft.pptx
+++ b/Docs/AR-Vision_成果発表_draft.pptx
@@ -5291,7 +5291,7 @@
                 <a:ea typeface="Yu Gothic" pitchFamily="34" charset="-122"/>
                 <a:cs typeface="Yu Gothic" pitchFamily="34" charset="-120"/>
               </a:rPr>
-              <a:t>開始→走行→ゴール→記録→ゴースト再走→GPS喪失/復帰→履歴 を自動判定</a:t>
+              <a:t>走行・ゴール・ゴースト再走・追い抜き・障害物・逸脱復帰・離隔待機・コーナー・GPS復帰・HUD抑制 を自動判定</a:t>
             </a:r>
             <a:endParaRPr lang="en-US" sz="1300" dirty="0"/>
           </a:p>
@@ -5330,7 +5330,7 @@
                 <a:ea typeface="Yu Gothic" pitchFamily="34" charset="-122"/>
                 <a:cs typeface="Yu Gothic" pitchFamily="34" charset="-120"/>
               </a:rPr>
-              <a:t>20/20</a:t>
+              <a:t>32/32</a:t>
             </a:r>
             <a:endParaRPr lang="en-US" sz="4000" dirty="0"/>
           </a:p>
